--- a/Manufacturing_Analytics_Presentation.pptx
+++ b/Manufacturing_Analytics_Presentation.pptx
@@ -7608,6 +7608,126 @@
           </a:p>
         </p:txBody>
       </p:sp>
+      <p:pic>
+        <p:nvPicPr>
+          <p:cNvPr id="15" name="Picture 14">
+            <a:extLst>
+              <a:ext uri="{FF2B5EF4-FFF2-40B4-BE49-F238E27FC236}">
+                <a16:creationId xmlns:a16="http://schemas.microsoft.com/office/drawing/2014/main" id="{A3EDD97C-949A-C77A-26D2-4C2CACF66BF7}"/>
+              </a:ext>
+            </a:extLst>
+          </p:cNvPr>
+          <p:cNvPicPr>
+            <a:picLocks noChangeAspect="1"/>
+          </p:cNvPicPr>
+          <p:nvPr/>
+        </p:nvPicPr>
+        <p:blipFill>
+          <a:blip r:embed="rId4"/>
+          <a:stretch>
+            <a:fillRect/>
+          </a:stretch>
+        </p:blipFill>
+        <p:spPr>
+          <a:xfrm>
+            <a:off x="2720428" y="1657871"/>
+            <a:ext cx="3116494" cy="4518000"/>
+          </a:xfrm>
+          <a:prstGeom prst="rect">
+            <a:avLst/>
+          </a:prstGeom>
+        </p:spPr>
+      </p:pic>
+      <p:pic>
+        <p:nvPicPr>
+          <p:cNvPr id="17" name="Picture 16">
+            <a:extLst>
+              <a:ext uri="{FF2B5EF4-FFF2-40B4-BE49-F238E27FC236}">
+                <a16:creationId xmlns:a16="http://schemas.microsoft.com/office/drawing/2014/main" id="{48403D32-35CE-71D4-5F4F-CA9C519B6854}"/>
+              </a:ext>
+            </a:extLst>
+          </p:cNvPr>
+          <p:cNvPicPr>
+            <a:picLocks noChangeAspect="1"/>
+          </p:cNvPicPr>
+          <p:nvPr/>
+        </p:nvPicPr>
+        <p:blipFill>
+          <a:blip r:embed="rId5"/>
+          <a:stretch>
+            <a:fillRect/>
+          </a:stretch>
+        </p:blipFill>
+        <p:spPr>
+          <a:xfrm>
+            <a:off x="5806440" y="1657871"/>
+            <a:ext cx="2949145" cy="4518000"/>
+          </a:xfrm>
+          <a:prstGeom prst="rect">
+            <a:avLst/>
+          </a:prstGeom>
+        </p:spPr>
+      </p:pic>
+      <p:pic>
+        <p:nvPicPr>
+          <p:cNvPr id="19" name="Picture 18">
+            <a:extLst>
+              <a:ext uri="{FF2B5EF4-FFF2-40B4-BE49-F238E27FC236}">
+                <a16:creationId xmlns:a16="http://schemas.microsoft.com/office/drawing/2014/main" id="{02F7B007-0441-773E-15CD-F7BED9489927}"/>
+              </a:ext>
+            </a:extLst>
+          </p:cNvPr>
+          <p:cNvPicPr>
+            <a:picLocks noChangeAspect="1"/>
+          </p:cNvPicPr>
+          <p:nvPr/>
+        </p:nvPicPr>
+        <p:blipFill>
+          <a:blip r:embed="rId6"/>
+          <a:stretch>
+            <a:fillRect/>
+          </a:stretch>
+        </p:blipFill>
+        <p:spPr>
+          <a:xfrm>
+            <a:off x="548640" y="1679977"/>
+            <a:ext cx="2491535" cy="4517136"/>
+          </a:xfrm>
+          <a:prstGeom prst="rect">
+            <a:avLst/>
+          </a:prstGeom>
+        </p:spPr>
+      </p:pic>
+      <p:pic>
+        <p:nvPicPr>
+          <p:cNvPr id="21" name="Picture 20">
+            <a:extLst>
+              <a:ext uri="{FF2B5EF4-FFF2-40B4-BE49-F238E27FC236}">
+                <a16:creationId xmlns:a16="http://schemas.microsoft.com/office/drawing/2014/main" id="{EA3A0656-A1DE-0594-9B4B-B67886AA4097}"/>
+              </a:ext>
+            </a:extLst>
+          </p:cNvPr>
+          <p:cNvPicPr>
+            <a:picLocks noChangeAspect="1"/>
+          </p:cNvPicPr>
+          <p:nvPr/>
+        </p:nvPicPr>
+        <p:blipFill>
+          <a:blip r:embed="rId7"/>
+          <a:stretch>
+            <a:fillRect/>
+          </a:stretch>
+        </p:blipFill>
+        <p:spPr>
+          <a:xfrm>
+            <a:off x="8755585" y="1657871"/>
+            <a:ext cx="2674415" cy="4518000"/>
+          </a:xfrm>
+          <a:prstGeom prst="rect">
+            <a:avLst/>
+          </a:prstGeom>
+        </p:spPr>
+      </p:pic>
     </p:spTree>
   </p:cSld>
   <p:clrMapOvr>
@@ -8600,6 +8720,36 @@
           </a:p>
         </p:txBody>
       </p:sp>
+      <p:pic>
+        <p:nvPicPr>
+          <p:cNvPr id="10" name="Picture 9">
+            <a:extLst>
+              <a:ext uri="{FF2B5EF4-FFF2-40B4-BE49-F238E27FC236}">
+                <a16:creationId xmlns:a16="http://schemas.microsoft.com/office/drawing/2014/main" id="{8781A063-32FC-DF63-01C8-B492FCE43878}"/>
+              </a:ext>
+            </a:extLst>
+          </p:cNvPr>
+          <p:cNvPicPr>
+            <a:picLocks noChangeAspect="1"/>
+          </p:cNvPicPr>
+          <p:nvPr/>
+        </p:nvPicPr>
+        <p:blipFill>
+          <a:blip r:embed="rId3"/>
+          <a:stretch>
+            <a:fillRect/>
+          </a:stretch>
+        </p:blipFill>
+        <p:spPr>
+          <a:xfrm>
+            <a:off x="2249424" y="1965960"/>
+            <a:ext cx="7699248" cy="4389120"/>
+          </a:xfrm>
+          <a:prstGeom prst="rect">
+            <a:avLst/>
+          </a:prstGeom>
+        </p:spPr>
+      </p:pic>
     </p:spTree>
   </p:cSld>
   <p:clrMapOvr>
@@ -8922,6 +9072,36 @@
           </a:p>
         </p:txBody>
       </p:sp>
+      <p:pic>
+        <p:nvPicPr>
+          <p:cNvPr id="10" name="Picture 9">
+            <a:extLst>
+              <a:ext uri="{FF2B5EF4-FFF2-40B4-BE49-F238E27FC236}">
+                <a16:creationId xmlns:a16="http://schemas.microsoft.com/office/drawing/2014/main" id="{EF2C607B-4BD2-A73B-AA0A-997AFD838C92}"/>
+              </a:ext>
+            </a:extLst>
+          </p:cNvPr>
+          <p:cNvPicPr>
+            <a:picLocks noChangeAspect="1"/>
+          </p:cNvPicPr>
+          <p:nvPr/>
+        </p:nvPicPr>
+        <p:blipFill>
+          <a:blip r:embed="rId3"/>
+          <a:stretch>
+            <a:fillRect/>
+          </a:stretch>
+        </p:blipFill>
+        <p:spPr>
+          <a:xfrm>
+            <a:off x="1255776" y="2070837"/>
+            <a:ext cx="9680448" cy="4293386"/>
+          </a:xfrm>
+          <a:prstGeom prst="rect">
+            <a:avLst/>
+          </a:prstGeom>
+        </p:spPr>
+      </p:pic>
     </p:spTree>
   </p:cSld>
   <p:clrMapOvr>
